--- a/curso_es/pptx/S89.pptx
+++ b/curso_es/pptx/S89.pptx
@@ -3800,7 +3800,7 @@
                 </a:solidFill>
                 <a:latin typeface="Nunito Sans"/>
               </a:rPr>
-              <a:t>Omar no sabe qué hacer tras 4.º. Le gusta arreglar cosas y se le dan bien las mates. Su cuadrilla va a Bachillerato. (Ejemplo inventado.)</a:t>
+              <a:t>Un chico no sabe qué hacer tras 4.º. Le gusta arreglar cosas y se le dan bien las mates. Su cuadrilla va a Bachillerato. (Ejemplo inventado.)</a:t>
             </a:r>
           </a:p>
         </p:txBody>
@@ -4127,7 +4127,7 @@
                 </a:solidFill>
                 <a:latin typeface="Nunito Sans"/>
               </a:rPr>
-              <a:t>Naiara cree que su examen está mal corregido: una respuesta correcta tiene un cero. Quiere protestar en clase a gritos. (Ejemplo inventado.)</a:t>
+              <a:t>Una chica cree que su examen está mal corregido: una respuesta correcta tiene un cero. Quiere protestar en clase a gritos. (Ejemplo inventado.)</a:t>
             </a:r>
           </a:p>
         </p:txBody>
@@ -4472,7 +4472,7 @@
                 </a:solidFill>
                 <a:latin typeface="Nunito Sans"/>
               </a:rPr>
-              <a:t>Yasmin irá a Bachillerato de Humanidades. Le encanta la historia y quiere ser periodista. Además, van tres amigas suyas. (Ejemplo inventado.)</a:t>
+              <a:t>Una chica irá a Bachillerato de Humanidades. Le encanta la historia y quiere ser periodista. Además, van tres amigas suyas. (Ejemplo inventado.)</a:t>
             </a:r>
           </a:p>
         </p:txBody>
@@ -4570,7 +4570,7 @@
                 </a:solidFill>
                 <a:latin typeface="Nunito Sans"/>
               </a:rPr>
-              <a:t>Pero Yasmin tiene razones propias: le gusta la historia y sabe a qué quiere dedicarse.</a:t>
+              <a:t>Pero esa chica tiene razones propias: le gusta la historia y sabe a qué quiere dedicarse.</a:t>
             </a:r>
           </a:p>
           <a:p>
@@ -6800,7 +6800,7 @@
                 </a:solidFill>
                 <a:latin typeface="Nunito Sans"/>
               </a:rPr>
-              <a:t>Alguien le dice a Maialen: «Si no vas a la universidad, serás una fracasada».</a:t>
+              <a:t>Alguien le dice a una chica: «Si no vas a la universidad, serás una fracasada».</a:t>
             </a:r>
           </a:p>
         </p:txBody>
